--- a/mon/toan/slide/lop12/Slide_TOAN12_Bai1_T1-6.pptx
+++ b/mon/toan/slide/lop12/Slide_TOAN12_Bai1_T1-6.pptx
@@ -3350,7 +3350,7 @@
                 </a:solidFill>
                 <a:latin typeface="Calibri"/>
               </a:rPr>
-              <a:t>GV soạn: Trương Tử Trang – Trường THPT Vĩnh Thạnh</a:t>
+              <a:t>GV soạn: TTT – Trường THPT</a:t>
             </a:r>
           </a:p>
         </p:txBody>
@@ -13076,50 +13076,6 @@
       <p:grpSpPr/>
       <p:sp>
         <p:nvSpPr>
-          <p:cNvPr id="2" name="Rectangle 1"/>
-          <p:cNvSpPr/>
-          <p:nvPr/>
-        </p:nvSpPr>
-        <p:spPr>
-          <a:xfrm>
-            <a:off x="457200" y="384048"/>
-            <a:ext cx="109728" cy="658368"/>
-          </a:xfrm>
-          <a:prstGeom prst="rect">
-            <a:avLst/>
-          </a:prstGeom>
-          <a:solidFill>
-            <a:srgbClr val="1E40AF"/>
-          </a:solidFill>
-          <a:ln>
-            <a:noFill/>
-          </a:ln>
-          <a:effectLst/>
-        </p:spPr>
-        <p:style>
-          <a:lnRef idx="1">
-            <a:schemeClr val="accent1"/>
-          </a:lnRef>
-          <a:fillRef idx="3">
-            <a:schemeClr val="accent1"/>
-          </a:fillRef>
-          <a:effectRef idx="2">
-            <a:schemeClr val="accent1"/>
-          </a:effectRef>
-          <a:fontRef idx="minor">
-            <a:schemeClr val="lt1"/>
-          </a:fontRef>
-        </p:style>
-        <p:txBody>
-          <a:bodyPr rtlCol="0" anchor="ctr"/>
-          <a:lstStyle/>
-          <a:p>
-            <a:pPr algn="ctr"/>
-          </a:p>
-        </p:txBody>
-      </p:sp>
-      <p:sp>
-        <p:nvSpPr>
           <p:cNvPr id="3" name="TextBox 2"/>
           <p:cNvSpPr txBox="1"/>
           <p:nvPr/>
@@ -13231,30 +13187,1637 @@
           </a:p>
         </p:txBody>
       </p:sp>
-      <p:pic>
-        <p:nvPicPr>
-          <p:cNvPr id="6" name="Picture 5" descr="rId37.png"/>
-          <p:cNvPicPr>
-            <a:picLocks noChangeAspect="1"/>
-          </p:cNvPicPr>
-          <p:nvPr/>
-        </p:nvPicPr>
-        <p:blipFill>
-          <a:blip r:embed="rId2"/>
-          <a:stretch>
-            <a:fillRect/>
-          </a:stretch>
-        </p:blipFill>
-        <p:spPr>
-          <a:xfrm>
-            <a:off x="2452400" y="1417320"/>
-            <a:ext cx="7256720" cy="4800600"/>
-          </a:xfrm>
-          <a:prstGeom prst="rect">
+      <p:cxnSp>
+        <p:nvCxnSpPr>
+          <p:cNvPr id="6" name="Connector 5"/>
+          <p:cNvCxnSpPr/>
+          <p:nvPr/>
+        </p:nvCxnSpPr>
+        <p:spPr>
+          <a:xfrm flipH="1" flipV="1">
+            <a:off x="4338888" y="2670962"/>
+            <a:ext cx="1688379" cy="1283818"/>
+          </a:xfrm>
+          <a:prstGeom prst="line">
             <a:avLst/>
           </a:prstGeom>
-        </p:spPr>
-      </p:pic>
+          <a:ln w="44450">
+            <a:solidFill>
+              <a:srgbClr val="548235"/>
+            </a:solidFill>
+          </a:ln>
+        </p:spPr>
+        <p:style>
+          <a:lnRef idx="2">
+            <a:schemeClr val="accent1"/>
+          </a:lnRef>
+          <a:fillRef idx="0">
+            <a:schemeClr val="accent1"/>
+          </a:fillRef>
+          <a:effectRef idx="1">
+            <a:schemeClr val="accent1"/>
+          </a:effectRef>
+          <a:fontRef idx="minor">
+            <a:schemeClr val="tx1"/>
+          </a:fontRef>
+        </p:style>
+      </p:cxnSp>
+      <p:cxnSp>
+        <p:nvCxnSpPr>
+          <p:cNvPr id="7" name="Connector 6"/>
+          <p:cNvCxnSpPr/>
+          <p:nvPr/>
+        </p:nvCxnSpPr>
+        <p:spPr>
+          <a:xfrm flipH="1" flipV="1">
+            <a:off x="2850629" y="1830405"/>
+            <a:ext cx="1488259" cy="840557"/>
+          </a:xfrm>
+          <a:prstGeom prst="line">
+            <a:avLst/>
+          </a:prstGeom>
+          <a:ln w="15875">
+            <a:solidFill>
+              <a:srgbClr val="548235"/>
+            </a:solidFill>
+          </a:ln>
+        </p:spPr>
+        <p:style>
+          <a:lnRef idx="2">
+            <a:schemeClr val="accent1"/>
+          </a:lnRef>
+          <a:fillRef idx="0">
+            <a:schemeClr val="accent1"/>
+          </a:fillRef>
+          <a:effectRef idx="1">
+            <a:schemeClr val="accent1"/>
+          </a:effectRef>
+          <a:fontRef idx="minor">
+            <a:schemeClr val="tx1"/>
+          </a:fontRef>
+        </p:style>
+      </p:cxnSp>
+      <p:sp>
+        <p:nvSpPr>
+          <p:cNvPr id="8" name="Rounded Rectangle 7"/>
+          <p:cNvSpPr/>
+          <p:nvPr/>
+        </p:nvSpPr>
+        <p:spPr>
+          <a:xfrm>
+            <a:off x="762012" y="1554093"/>
+            <a:ext cx="2088617" cy="552622"/>
+          </a:xfrm>
+          <a:prstGeom prst="roundRect">
+            <a:avLst>
+              <a:gd name="adj" fmla="val 50000"/>
+            </a:avLst>
+          </a:prstGeom>
+          <a:solidFill>
+            <a:srgbClr val="EDF5E8"/>
+          </a:solidFill>
+          <a:ln w="15875">
+            <a:solidFill>
+              <a:srgbClr val="548235"/>
+            </a:solidFill>
+          </a:ln>
+          <a:effectLst/>
+        </p:spPr>
+        <p:style>
+          <a:lnRef idx="1">
+            <a:schemeClr val="accent1"/>
+          </a:lnRef>
+          <a:fillRef idx="3">
+            <a:schemeClr val="accent1"/>
+          </a:fillRef>
+          <a:effectRef idx="2">
+            <a:schemeClr val="accent1"/>
+          </a:effectRef>
+          <a:fontRef idx="minor">
+            <a:schemeClr val="lt1"/>
+          </a:fontRef>
+        </p:style>
+        <p:txBody>
+          <a:bodyPr rtlCol="0" anchor="ctr" wrap="none" lIns="64000" rIns="64000" tIns="25400" bIns="25400"/>
+          <a:lstStyle/>
+          <a:p>
+            <a:pPr algn="ctr"/>
+            <a:r>
+              <a:rPr sz="1300" b="0">
+                <a:solidFill>
+                  <a:srgbClr val="000000"/>
+                </a:solidFill>
+                <a:latin typeface="Calibri"/>
+              </a:rPr>
+              <a:t>Đồng biến trên (a;b):</a:t>
+            </a:r>
+          </a:p>
+          <a:p>
+            <a:pPr algn="ctr"/>
+            <a:r>
+              <a:rPr sz="1300" b="0">
+                <a:solidFill>
+                  <a:srgbClr val="000000"/>
+                </a:solidFill>
+                <a:latin typeface="Calibri"/>
+              </a:rPr>
+              <a:t>y'&gt;0</a:t>
+            </a:r>
+          </a:p>
+        </p:txBody>
+      </p:sp>
+      <p:cxnSp>
+        <p:nvCxnSpPr>
+          <p:cNvPr id="9" name="Connector 8"/>
+          <p:cNvCxnSpPr/>
+          <p:nvPr/>
+        </p:nvCxnSpPr>
+        <p:spPr>
+          <a:xfrm flipH="1" flipV="1">
+            <a:off x="2936481" y="2457917"/>
+            <a:ext cx="1402407" cy="213045"/>
+          </a:xfrm>
+          <a:prstGeom prst="line">
+            <a:avLst/>
+          </a:prstGeom>
+          <a:ln w="15875">
+            <a:solidFill>
+              <a:srgbClr val="548235"/>
+            </a:solidFill>
+          </a:ln>
+        </p:spPr>
+        <p:style>
+          <a:lnRef idx="2">
+            <a:schemeClr val="accent1"/>
+          </a:lnRef>
+          <a:fillRef idx="0">
+            <a:schemeClr val="accent1"/>
+          </a:fillRef>
+          <a:effectRef idx="1">
+            <a:schemeClr val="accent1"/>
+          </a:effectRef>
+          <a:fontRef idx="minor">
+            <a:schemeClr val="tx1"/>
+          </a:fontRef>
+        </p:style>
+      </p:cxnSp>
+      <p:sp>
+        <p:nvSpPr>
+          <p:cNvPr id="10" name="Rounded Rectangle 9"/>
+          <p:cNvSpPr/>
+          <p:nvPr/>
+        </p:nvSpPr>
+        <p:spPr>
+          <a:xfrm>
+            <a:off x="676160" y="2181606"/>
+            <a:ext cx="2260321" cy="552622"/>
+          </a:xfrm>
+          <a:prstGeom prst="roundRect">
+            <a:avLst>
+              <a:gd name="adj" fmla="val 50000"/>
+            </a:avLst>
+          </a:prstGeom>
+          <a:solidFill>
+            <a:srgbClr val="EDF5E8"/>
+          </a:solidFill>
+          <a:ln w="15875">
+            <a:solidFill>
+              <a:srgbClr val="548235"/>
+            </a:solidFill>
+          </a:ln>
+          <a:effectLst/>
+        </p:spPr>
+        <p:style>
+          <a:lnRef idx="1">
+            <a:schemeClr val="accent1"/>
+          </a:lnRef>
+          <a:fillRef idx="3">
+            <a:schemeClr val="accent1"/>
+          </a:fillRef>
+          <a:effectRef idx="2">
+            <a:schemeClr val="accent1"/>
+          </a:effectRef>
+          <a:fontRef idx="minor">
+            <a:schemeClr val="lt1"/>
+          </a:fontRef>
+        </p:style>
+        <p:txBody>
+          <a:bodyPr rtlCol="0" anchor="ctr" wrap="none" lIns="64000" rIns="64000" tIns="25400" bIns="25400"/>
+          <a:lstStyle/>
+          <a:p>
+            <a:pPr algn="ctr"/>
+            <a:r>
+              <a:rPr sz="1300" b="0">
+                <a:solidFill>
+                  <a:srgbClr val="000000"/>
+                </a:solidFill>
+                <a:latin typeface="Calibri"/>
+              </a:rPr>
+              <a:t>Nghịch biến trên (a;b):</a:t>
+            </a:r>
+          </a:p>
+          <a:p>
+            <a:pPr algn="ctr"/>
+            <a:r>
+              <a:rPr sz="1300" b="0">
+                <a:solidFill>
+                  <a:srgbClr val="000000"/>
+                </a:solidFill>
+                <a:latin typeface="Calibri"/>
+              </a:rPr>
+              <a:t>y'&lt;0</a:t>
+            </a:r>
+          </a:p>
+        </p:txBody>
+      </p:sp>
+      <p:cxnSp>
+        <p:nvCxnSpPr>
+          <p:cNvPr id="11" name="Connector 10"/>
+          <p:cNvCxnSpPr/>
+          <p:nvPr/>
+        </p:nvCxnSpPr>
+        <p:spPr>
+          <a:xfrm flipH="1">
+            <a:off x="2764777" y="2670962"/>
+            <a:ext cx="1574111" cy="313756"/>
+          </a:xfrm>
+          <a:prstGeom prst="line">
+            <a:avLst/>
+          </a:prstGeom>
+          <a:ln w="15875">
+            <a:solidFill>
+              <a:srgbClr val="548235"/>
+            </a:solidFill>
+          </a:ln>
+        </p:spPr>
+        <p:style>
+          <a:lnRef idx="2">
+            <a:schemeClr val="accent1"/>
+          </a:lnRef>
+          <a:fillRef idx="0">
+            <a:schemeClr val="accent1"/>
+          </a:fillRef>
+          <a:effectRef idx="1">
+            <a:schemeClr val="accent1"/>
+          </a:effectRef>
+          <a:fontRef idx="minor">
+            <a:schemeClr val="tx1"/>
+          </a:fontRef>
+        </p:style>
+      </p:cxnSp>
+      <p:sp>
+        <p:nvSpPr>
+          <p:cNvPr id="12" name="Rounded Rectangle 11"/>
+          <p:cNvSpPr/>
+          <p:nvPr/>
+        </p:nvSpPr>
+        <p:spPr>
+          <a:xfrm>
+            <a:off x="847864" y="2809118"/>
+            <a:ext cx="1916913" cy="351200"/>
+          </a:xfrm>
+          <a:prstGeom prst="roundRect">
+            <a:avLst>
+              <a:gd name="adj" fmla="val 50000"/>
+            </a:avLst>
+          </a:prstGeom>
+          <a:solidFill>
+            <a:srgbClr val="EDF5E8"/>
+          </a:solidFill>
+          <a:ln w="15875">
+            <a:solidFill>
+              <a:srgbClr val="548235"/>
+            </a:solidFill>
+          </a:ln>
+          <a:effectLst/>
+        </p:spPr>
+        <p:style>
+          <a:lnRef idx="1">
+            <a:schemeClr val="accent1"/>
+          </a:lnRef>
+          <a:fillRef idx="3">
+            <a:schemeClr val="accent1"/>
+          </a:fillRef>
+          <a:effectRef idx="2">
+            <a:schemeClr val="accent1"/>
+          </a:effectRef>
+          <a:fontRef idx="minor">
+            <a:schemeClr val="lt1"/>
+          </a:fontRef>
+        </p:style>
+        <p:txBody>
+          <a:bodyPr rtlCol="0" anchor="ctr" wrap="none" lIns="64000" rIns="64000" tIns="25400" bIns="25400"/>
+          <a:lstStyle/>
+          <a:p>
+            <a:pPr algn="ctr"/>
+            <a:r>
+              <a:rPr sz="1300" b="0">
+                <a:solidFill>
+                  <a:srgbClr val="000000"/>
+                </a:solidFill>
+                <a:latin typeface="Calibri"/>
+              </a:rPr>
+              <a:t>Lập bảng biến thiên</a:t>
+            </a:r>
+          </a:p>
+        </p:txBody>
+      </p:sp>
+      <p:cxnSp>
+        <p:nvCxnSpPr>
+          <p:cNvPr id="13" name="Connector 12"/>
+          <p:cNvCxnSpPr/>
+          <p:nvPr/>
+        </p:nvCxnSpPr>
+        <p:spPr>
+          <a:xfrm flipH="1">
+            <a:off x="2807703" y="2670962"/>
+            <a:ext cx="1531185" cy="840557"/>
+          </a:xfrm>
+          <a:prstGeom prst="line">
+            <a:avLst/>
+          </a:prstGeom>
+          <a:ln w="15875">
+            <a:solidFill>
+              <a:srgbClr val="548235"/>
+            </a:solidFill>
+          </a:ln>
+        </p:spPr>
+        <p:style>
+          <a:lnRef idx="2">
+            <a:schemeClr val="accent1"/>
+          </a:lnRef>
+          <a:fillRef idx="0">
+            <a:schemeClr val="accent1"/>
+          </a:fillRef>
+          <a:effectRef idx="1">
+            <a:schemeClr val="accent1"/>
+          </a:effectRef>
+          <a:fontRef idx="minor">
+            <a:schemeClr val="tx1"/>
+          </a:fontRef>
+        </p:style>
+      </p:cxnSp>
+      <p:sp>
+        <p:nvSpPr>
+          <p:cNvPr id="14" name="Rounded Rectangle 13"/>
+          <p:cNvSpPr/>
+          <p:nvPr/>
+        </p:nvSpPr>
+        <p:spPr>
+          <a:xfrm>
+            <a:off x="804938" y="3235208"/>
+            <a:ext cx="2002765" cy="552622"/>
+          </a:xfrm>
+          <a:prstGeom prst="roundRect">
+            <a:avLst>
+              <a:gd name="adj" fmla="val 50000"/>
+            </a:avLst>
+          </a:prstGeom>
+          <a:solidFill>
+            <a:srgbClr val="EDF5E8"/>
+          </a:solidFill>
+          <a:ln w="15875">
+            <a:solidFill>
+              <a:srgbClr val="548235"/>
+            </a:solidFill>
+          </a:ln>
+          <a:effectLst/>
+        </p:spPr>
+        <p:style>
+          <a:lnRef idx="1">
+            <a:schemeClr val="accent1"/>
+          </a:lnRef>
+          <a:fillRef idx="3">
+            <a:schemeClr val="accent1"/>
+          </a:fillRef>
+          <a:effectRef idx="2">
+            <a:schemeClr val="accent1"/>
+          </a:effectRef>
+          <a:fontRef idx="minor">
+            <a:schemeClr val="lt1"/>
+          </a:fontRef>
+        </p:style>
+        <p:txBody>
+          <a:bodyPr rtlCol="0" anchor="ctr" wrap="none" lIns="64000" rIns="64000" tIns="25400" bIns="25400"/>
+          <a:lstStyle/>
+          <a:p>
+            <a:pPr algn="ctr"/>
+            <a:r>
+              <a:rPr sz="1300" b="0">
+                <a:solidFill>
+                  <a:srgbClr val="000000"/>
+                </a:solidFill>
+                <a:latin typeface="Calibri"/>
+              </a:rPr>
+              <a:t>Tìm khoảng đơn điệu:</a:t>
+            </a:r>
+          </a:p>
+          <a:p>
+            <a:pPr algn="ctr"/>
+            <a:r>
+              <a:rPr sz="1300" b="0">
+                <a:solidFill>
+                  <a:srgbClr val="000000"/>
+                </a:solidFill>
+                <a:latin typeface="Calibri"/>
+              </a:rPr>
+              <a:t>giải y'=0</a:t>
+            </a:r>
+          </a:p>
+        </p:txBody>
+      </p:sp>
+      <p:sp>
+        <p:nvSpPr>
+          <p:cNvPr id="15" name="Oval 14"/>
+          <p:cNvSpPr/>
+          <p:nvPr/>
+        </p:nvSpPr>
+        <p:spPr>
+          <a:xfrm>
+            <a:off x="3294580" y="2259078"/>
+            <a:ext cx="2088617" cy="823767"/>
+          </a:xfrm>
+          <a:prstGeom prst="ellipse">
+            <a:avLst/>
+          </a:prstGeom>
+          <a:solidFill>
+            <a:srgbClr val="E2EFDA"/>
+          </a:solidFill>
+          <a:ln w="31750">
+            <a:solidFill>
+              <a:srgbClr val="375623"/>
+            </a:solidFill>
+          </a:ln>
+          <a:effectLst/>
+        </p:spPr>
+        <p:style>
+          <a:lnRef idx="1">
+            <a:schemeClr val="accent1"/>
+          </a:lnRef>
+          <a:fillRef idx="3">
+            <a:schemeClr val="accent1"/>
+          </a:fillRef>
+          <a:effectRef idx="2">
+            <a:schemeClr val="accent1"/>
+          </a:effectRef>
+          <a:fontRef idx="minor">
+            <a:schemeClr val="lt1"/>
+          </a:fontRef>
+        </p:style>
+        <p:txBody>
+          <a:bodyPr rtlCol="0" anchor="ctr" wrap="none" lIns="64000" rIns="64000" tIns="25400" bIns="25400"/>
+          <a:lstStyle/>
+          <a:p>
+            <a:pPr algn="ctr"/>
+            <a:r>
+              <a:rPr sz="1500" b="1">
+                <a:solidFill>
+                  <a:srgbClr val="000000"/>
+                </a:solidFill>
+                <a:latin typeface="Calibri"/>
+              </a:rPr>
+              <a:t>Tính đơn điệu</a:t>
+            </a:r>
+          </a:p>
+          <a:p>
+            <a:pPr algn="ctr"/>
+            <a:r>
+              <a:rPr sz="1500" b="1">
+                <a:solidFill>
+                  <a:srgbClr val="000000"/>
+                </a:solidFill>
+                <a:latin typeface="Calibri"/>
+              </a:rPr>
+              <a:t>hàm số</a:t>
+            </a:r>
+          </a:p>
+        </p:txBody>
+      </p:sp>
+      <p:cxnSp>
+        <p:nvCxnSpPr>
+          <p:cNvPr id="16" name="Connector 15"/>
+          <p:cNvCxnSpPr/>
+          <p:nvPr/>
+        </p:nvCxnSpPr>
+        <p:spPr>
+          <a:xfrm flipV="1">
+            <a:off x="6027267" y="2670962"/>
+            <a:ext cx="1688379" cy="1283818"/>
+          </a:xfrm>
+          <a:prstGeom prst="line">
+            <a:avLst/>
+          </a:prstGeom>
+          <a:ln w="44450">
+            <a:solidFill>
+              <a:srgbClr val="BF8F00"/>
+            </a:solidFill>
+          </a:ln>
+        </p:spPr>
+        <p:style>
+          <a:lnRef idx="2">
+            <a:schemeClr val="accent1"/>
+          </a:lnRef>
+          <a:fillRef idx="0">
+            <a:schemeClr val="accent1"/>
+          </a:fillRef>
+          <a:effectRef idx="1">
+            <a:schemeClr val="accent1"/>
+          </a:effectRef>
+          <a:fontRef idx="minor">
+            <a:schemeClr val="tx1"/>
+          </a:fontRef>
+        </p:style>
+      </p:cxnSp>
+      <p:cxnSp>
+        <p:nvCxnSpPr>
+          <p:cNvPr id="17" name="Connector 16"/>
+          <p:cNvCxnSpPr/>
+          <p:nvPr/>
+        </p:nvCxnSpPr>
+        <p:spPr>
+          <a:xfrm flipV="1">
+            <a:off x="7715646" y="2043450"/>
+            <a:ext cx="1745815" cy="627512"/>
+          </a:xfrm>
+          <a:prstGeom prst="line">
+            <a:avLst/>
+          </a:prstGeom>
+          <a:ln w="15875">
+            <a:solidFill>
+              <a:srgbClr val="BF8F00"/>
+            </a:solidFill>
+          </a:ln>
+        </p:spPr>
+        <p:style>
+          <a:lnRef idx="2">
+            <a:schemeClr val="accent1"/>
+          </a:lnRef>
+          <a:fillRef idx="0">
+            <a:schemeClr val="accent1"/>
+          </a:fillRef>
+          <a:effectRef idx="1">
+            <a:schemeClr val="accent1"/>
+          </a:effectRef>
+          <a:fontRef idx="minor">
+            <a:schemeClr val="tx1"/>
+          </a:fontRef>
+        </p:style>
+      </p:cxnSp>
+      <p:sp>
+        <p:nvSpPr>
+          <p:cNvPr id="18" name="Rounded Rectangle 17"/>
+          <p:cNvSpPr/>
+          <p:nvPr/>
+        </p:nvSpPr>
+        <p:spPr>
+          <a:xfrm>
+            <a:off x="9461461" y="1767138"/>
+            <a:ext cx="1573505" cy="552622"/>
+          </a:xfrm>
+          <a:prstGeom prst="roundRect">
+            <a:avLst>
+              <a:gd name="adj" fmla="val 50000"/>
+            </a:avLst>
+          </a:prstGeom>
+          <a:solidFill>
+            <a:srgbClr val="FFF8E1"/>
+          </a:solidFill>
+          <a:ln w="15875">
+            <a:solidFill>
+              <a:srgbClr val="BF8F00"/>
+            </a:solidFill>
+          </a:ln>
+          <a:effectLst/>
+        </p:spPr>
+        <p:style>
+          <a:lnRef idx="1">
+            <a:schemeClr val="accent1"/>
+          </a:lnRef>
+          <a:fillRef idx="3">
+            <a:schemeClr val="accent1"/>
+          </a:fillRef>
+          <a:effectRef idx="2">
+            <a:schemeClr val="accent1"/>
+          </a:effectRef>
+          <a:fontRef idx="minor">
+            <a:schemeClr val="lt1"/>
+          </a:fontRef>
+        </p:style>
+        <p:txBody>
+          <a:bodyPr rtlCol="0" anchor="ctr" wrap="none" lIns="64000" rIns="64000" tIns="25400" bIns="25400"/>
+          <a:lstStyle/>
+          <a:p>
+            <a:pPr algn="ctr"/>
+            <a:r>
+              <a:rPr sz="1300" b="0">
+                <a:solidFill>
+                  <a:srgbClr val="000000"/>
+                </a:solidFill>
+                <a:latin typeface="Calibri"/>
+              </a:rPr>
+              <a:t>Cực đại: y' đổi</a:t>
+            </a:r>
+          </a:p>
+          <a:p>
+            <a:pPr algn="ctr"/>
+            <a:r>
+              <a:rPr sz="1300" b="0">
+                <a:solidFill>
+                  <a:srgbClr val="000000"/>
+                </a:solidFill>
+                <a:latin typeface="Calibri"/>
+              </a:rPr>
+              <a:t>dấu + → −</a:t>
+            </a:r>
+          </a:p>
+        </p:txBody>
+      </p:sp>
+      <p:cxnSp>
+        <p:nvCxnSpPr>
+          <p:cNvPr id="19" name="Connector 18"/>
+          <p:cNvCxnSpPr/>
+          <p:nvPr/>
+        </p:nvCxnSpPr>
+        <p:spPr>
+          <a:xfrm>
+            <a:off x="7715646" y="2670962"/>
+            <a:ext cx="1702889" cy="0"/>
+          </a:xfrm>
+          <a:prstGeom prst="line">
+            <a:avLst/>
+          </a:prstGeom>
+          <a:ln w="15875">
+            <a:solidFill>
+              <a:srgbClr val="BF8F00"/>
+            </a:solidFill>
+          </a:ln>
+        </p:spPr>
+        <p:style>
+          <a:lnRef idx="2">
+            <a:schemeClr val="accent1"/>
+          </a:lnRef>
+          <a:fillRef idx="0">
+            <a:schemeClr val="accent1"/>
+          </a:fillRef>
+          <a:effectRef idx="1">
+            <a:schemeClr val="accent1"/>
+          </a:effectRef>
+          <a:fontRef idx="minor">
+            <a:schemeClr val="tx1"/>
+          </a:fontRef>
+        </p:style>
+      </p:cxnSp>
+      <p:sp>
+        <p:nvSpPr>
+          <p:cNvPr id="20" name="Rounded Rectangle 19"/>
+          <p:cNvSpPr/>
+          <p:nvPr/>
+        </p:nvSpPr>
+        <p:spPr>
+          <a:xfrm>
+            <a:off x="9418535" y="2394651"/>
+            <a:ext cx="1659357" cy="552622"/>
+          </a:xfrm>
+          <a:prstGeom prst="roundRect">
+            <a:avLst>
+              <a:gd name="adj" fmla="val 50000"/>
+            </a:avLst>
+          </a:prstGeom>
+          <a:solidFill>
+            <a:srgbClr val="FFF8E1"/>
+          </a:solidFill>
+          <a:ln w="15875">
+            <a:solidFill>
+              <a:srgbClr val="BF8F00"/>
+            </a:solidFill>
+          </a:ln>
+          <a:effectLst/>
+        </p:spPr>
+        <p:style>
+          <a:lnRef idx="1">
+            <a:schemeClr val="accent1"/>
+          </a:lnRef>
+          <a:fillRef idx="3">
+            <a:schemeClr val="accent1"/>
+          </a:fillRef>
+          <a:effectRef idx="2">
+            <a:schemeClr val="accent1"/>
+          </a:effectRef>
+          <a:fontRef idx="minor">
+            <a:schemeClr val="lt1"/>
+          </a:fontRef>
+        </p:style>
+        <p:txBody>
+          <a:bodyPr rtlCol="0" anchor="ctr" wrap="none" lIns="64000" rIns="64000" tIns="25400" bIns="25400"/>
+          <a:lstStyle/>
+          <a:p>
+            <a:pPr algn="ctr"/>
+            <a:r>
+              <a:rPr sz="1300" b="0">
+                <a:solidFill>
+                  <a:srgbClr val="000000"/>
+                </a:solidFill>
+                <a:latin typeface="Calibri"/>
+              </a:rPr>
+              <a:t>Cực tiểu: y' đổi</a:t>
+            </a:r>
+          </a:p>
+          <a:p>
+            <a:pPr algn="ctr"/>
+            <a:r>
+              <a:rPr sz="1300" b="0">
+                <a:solidFill>
+                  <a:srgbClr val="000000"/>
+                </a:solidFill>
+                <a:latin typeface="Calibri"/>
+              </a:rPr>
+              <a:t>dấu − → +</a:t>
+            </a:r>
+          </a:p>
+        </p:txBody>
+      </p:sp>
+      <p:cxnSp>
+        <p:nvCxnSpPr>
+          <p:cNvPr id="21" name="Connector 20"/>
+          <p:cNvCxnSpPr/>
+          <p:nvPr/>
+        </p:nvCxnSpPr>
+        <p:spPr>
+          <a:xfrm>
+            <a:off x="7715646" y="2670962"/>
+            <a:ext cx="1659963" cy="627512"/>
+          </a:xfrm>
+          <a:prstGeom prst="line">
+            <a:avLst/>
+          </a:prstGeom>
+          <a:ln w="15875">
+            <a:solidFill>
+              <a:srgbClr val="BF8F00"/>
+            </a:solidFill>
+          </a:ln>
+        </p:spPr>
+        <p:style>
+          <a:lnRef idx="2">
+            <a:schemeClr val="accent1"/>
+          </a:lnRef>
+          <a:fillRef idx="0">
+            <a:schemeClr val="accent1"/>
+          </a:fillRef>
+          <a:effectRef idx="1">
+            <a:schemeClr val="accent1"/>
+          </a:effectRef>
+          <a:fontRef idx="minor">
+            <a:schemeClr val="tx1"/>
+          </a:fontRef>
+        </p:style>
+      </p:cxnSp>
+      <p:sp>
+        <p:nvSpPr>
+          <p:cNvPr id="22" name="Rounded Rectangle 21"/>
+          <p:cNvSpPr/>
+          <p:nvPr/>
+        </p:nvSpPr>
+        <p:spPr>
+          <a:xfrm>
+            <a:off x="9375609" y="3022163"/>
+            <a:ext cx="1745209" cy="552622"/>
+          </a:xfrm>
+          <a:prstGeom prst="roundRect">
+            <a:avLst>
+              <a:gd name="adj" fmla="val 50000"/>
+            </a:avLst>
+          </a:prstGeom>
+          <a:solidFill>
+            <a:srgbClr val="FFF8E1"/>
+          </a:solidFill>
+          <a:ln w="15875">
+            <a:solidFill>
+              <a:srgbClr val="BF8F00"/>
+            </a:solidFill>
+          </a:ln>
+          <a:effectLst/>
+        </p:spPr>
+        <p:style>
+          <a:lnRef idx="1">
+            <a:schemeClr val="accent1"/>
+          </a:lnRef>
+          <a:fillRef idx="3">
+            <a:schemeClr val="accent1"/>
+          </a:fillRef>
+          <a:effectRef idx="2">
+            <a:schemeClr val="accent1"/>
+          </a:effectRef>
+          <a:fontRef idx="minor">
+            <a:schemeClr val="lt1"/>
+          </a:fontRef>
+        </p:style>
+        <p:txBody>
+          <a:bodyPr rtlCol="0" anchor="ctr" wrap="none" lIns="64000" rIns="64000" tIns="25400" bIns="25400"/>
+          <a:lstStyle/>
+          <a:p>
+            <a:pPr algn="ctr"/>
+            <a:r>
+              <a:rPr sz="1300" b="0">
+                <a:solidFill>
+                  <a:srgbClr val="000000"/>
+                </a:solidFill>
+                <a:latin typeface="Calibri"/>
+              </a:rPr>
+              <a:t>y' không đổi dấu:</a:t>
+            </a:r>
+          </a:p>
+          <a:p>
+            <a:pPr algn="ctr"/>
+            <a:r>
+              <a:rPr sz="1300" b="0">
+                <a:solidFill>
+                  <a:srgbClr val="000000"/>
+                </a:solidFill>
+                <a:latin typeface="Calibri"/>
+              </a:rPr>
+              <a:t>không cực trị</a:t>
+            </a:r>
+          </a:p>
+        </p:txBody>
+      </p:sp>
+      <p:sp>
+        <p:nvSpPr>
+          <p:cNvPr id="23" name="Oval 22"/>
+          <p:cNvSpPr/>
+          <p:nvPr/>
+        </p:nvSpPr>
+        <p:spPr>
+          <a:xfrm>
+            <a:off x="6810021" y="2259078"/>
+            <a:ext cx="1811249" cy="823767"/>
+          </a:xfrm>
+          <a:prstGeom prst="ellipse">
+            <a:avLst/>
+          </a:prstGeom>
+          <a:solidFill>
+            <a:srgbClr val="FFF2CC"/>
+          </a:solidFill>
+          <a:ln w="31750">
+            <a:solidFill>
+              <a:srgbClr val="BF8F00"/>
+            </a:solidFill>
+          </a:ln>
+          <a:effectLst/>
+        </p:spPr>
+        <p:style>
+          <a:lnRef idx="1">
+            <a:schemeClr val="accent1"/>
+          </a:lnRef>
+          <a:fillRef idx="3">
+            <a:schemeClr val="accent1"/>
+          </a:fillRef>
+          <a:effectRef idx="2">
+            <a:schemeClr val="accent1"/>
+          </a:effectRef>
+          <a:fontRef idx="minor">
+            <a:schemeClr val="lt1"/>
+          </a:fontRef>
+        </p:style>
+        <p:txBody>
+          <a:bodyPr rtlCol="0" anchor="ctr" wrap="none" lIns="64000" rIns="64000" tIns="25400" bIns="25400"/>
+          <a:lstStyle/>
+          <a:p>
+            <a:pPr algn="ctr"/>
+            <a:r>
+              <a:rPr sz="1500" b="1">
+                <a:solidFill>
+                  <a:srgbClr val="000000"/>
+                </a:solidFill>
+                <a:latin typeface="Calibri"/>
+              </a:rPr>
+              <a:t>Cực trị hàm</a:t>
+            </a:r>
+          </a:p>
+          <a:p>
+            <a:pPr algn="ctr"/>
+            <a:r>
+              <a:rPr sz="1500" b="1">
+                <a:solidFill>
+                  <a:srgbClr val="000000"/>
+                </a:solidFill>
+                <a:latin typeface="Calibri"/>
+              </a:rPr>
+              <a:t>số</a:t>
+            </a:r>
+          </a:p>
+        </p:txBody>
+      </p:sp>
+      <p:cxnSp>
+        <p:nvCxnSpPr>
+          <p:cNvPr id="24" name="Connector 23"/>
+          <p:cNvCxnSpPr/>
+          <p:nvPr/>
+        </p:nvCxnSpPr>
+        <p:spPr>
+          <a:xfrm flipH="1">
+            <a:off x="4338888" y="3954780"/>
+            <a:ext cx="1688379" cy="1283817"/>
+          </a:xfrm>
+          <a:prstGeom prst="line">
+            <a:avLst/>
+          </a:prstGeom>
+          <a:ln w="44450">
+            <a:solidFill>
+              <a:srgbClr val="2F5597"/>
+            </a:solidFill>
+          </a:ln>
+        </p:spPr>
+        <p:style>
+          <a:lnRef idx="2">
+            <a:schemeClr val="accent1"/>
+          </a:lnRef>
+          <a:fillRef idx="0">
+            <a:schemeClr val="accent1"/>
+          </a:fillRef>
+          <a:effectRef idx="1">
+            <a:schemeClr val="accent1"/>
+          </a:effectRef>
+          <a:fontRef idx="minor">
+            <a:schemeClr val="tx1"/>
+          </a:fontRef>
+        </p:style>
+      </p:cxnSp>
+      <p:cxnSp>
+        <p:nvCxnSpPr>
+          <p:cNvPr id="25" name="Connector 24"/>
+          <p:cNvCxnSpPr/>
+          <p:nvPr/>
+        </p:nvCxnSpPr>
+        <p:spPr>
+          <a:xfrm flipH="1" flipV="1">
+            <a:off x="2550147" y="4824130"/>
+            <a:ext cx="1788741" cy="414467"/>
+          </a:xfrm>
+          <a:prstGeom prst="line">
+            <a:avLst/>
+          </a:prstGeom>
+          <a:ln w="15875">
+            <a:solidFill>
+              <a:srgbClr val="2F5597"/>
+            </a:solidFill>
+          </a:ln>
+        </p:spPr>
+        <p:style>
+          <a:lnRef idx="2">
+            <a:schemeClr val="accent1"/>
+          </a:lnRef>
+          <a:fillRef idx="0">
+            <a:schemeClr val="accent1"/>
+          </a:fillRef>
+          <a:effectRef idx="1">
+            <a:schemeClr val="accent1"/>
+          </a:effectRef>
+          <a:fontRef idx="minor">
+            <a:schemeClr val="tx1"/>
+          </a:fontRef>
+        </p:style>
+      </p:cxnSp>
+      <p:sp>
+        <p:nvSpPr>
+          <p:cNvPr id="26" name="Rounded Rectangle 25"/>
+          <p:cNvSpPr/>
+          <p:nvPr/>
+        </p:nvSpPr>
+        <p:spPr>
+          <a:xfrm>
+            <a:off x="1062494" y="4547819"/>
+            <a:ext cx="1487653" cy="552622"/>
+          </a:xfrm>
+          <a:prstGeom prst="roundRect">
+            <a:avLst>
+              <a:gd name="adj" fmla="val 50000"/>
+            </a:avLst>
+          </a:prstGeom>
+          <a:solidFill>
+            <a:srgbClr val="E3EEF9"/>
+          </a:solidFill>
+          <a:ln w="15875">
+            <a:solidFill>
+              <a:srgbClr val="2F5597"/>
+            </a:solidFill>
+          </a:ln>
+          <a:effectLst/>
+        </p:spPr>
+        <p:style>
+          <a:lnRef idx="1">
+            <a:schemeClr val="accent1"/>
+          </a:lnRef>
+          <a:fillRef idx="3">
+            <a:schemeClr val="accent1"/>
+          </a:fillRef>
+          <a:effectRef idx="2">
+            <a:schemeClr val="accent1"/>
+          </a:effectRef>
+          <a:fontRef idx="minor">
+            <a:schemeClr val="lt1"/>
+          </a:fontRef>
+        </p:style>
+        <p:txBody>
+          <a:bodyPr rtlCol="0" anchor="ctr" wrap="none" lIns="64000" rIns="64000" tIns="25400" bIns="25400"/>
+          <a:lstStyle/>
+          <a:p>
+            <a:pPr algn="ctr"/>
+            <a:r>
+              <a:rPr sz="1300" b="0">
+                <a:solidFill>
+                  <a:srgbClr val="000000"/>
+                </a:solidFill>
+                <a:latin typeface="Calibri"/>
+              </a:rPr>
+              <a:t>Quy tắc 1 (dấu</a:t>
+            </a:r>
+          </a:p>
+          <a:p>
+            <a:pPr algn="ctr"/>
+            <a:r>
+              <a:rPr sz="1300" b="0">
+                <a:solidFill>
+                  <a:srgbClr val="000000"/>
+                </a:solidFill>
+                <a:latin typeface="Calibri"/>
+              </a:rPr>
+              <a:t>y'): BBT</a:t>
+            </a:r>
+          </a:p>
+        </p:txBody>
+      </p:sp>
+      <p:cxnSp>
+        <p:nvCxnSpPr>
+          <p:cNvPr id="27" name="Connector 26"/>
+          <p:cNvCxnSpPr/>
+          <p:nvPr/>
+        </p:nvCxnSpPr>
+        <p:spPr>
+          <a:xfrm flipH="1">
+            <a:off x="3022333" y="5238597"/>
+            <a:ext cx="1316555" cy="313756"/>
+          </a:xfrm>
+          <a:prstGeom prst="line">
+            <a:avLst/>
+          </a:prstGeom>
+          <a:ln w="15875">
+            <a:solidFill>
+              <a:srgbClr val="2F5597"/>
+            </a:solidFill>
+          </a:ln>
+        </p:spPr>
+        <p:style>
+          <a:lnRef idx="2">
+            <a:schemeClr val="accent1"/>
+          </a:lnRef>
+          <a:fillRef idx="0">
+            <a:schemeClr val="accent1"/>
+          </a:fillRef>
+          <a:effectRef idx="1">
+            <a:schemeClr val="accent1"/>
+          </a:effectRef>
+          <a:fontRef idx="minor">
+            <a:schemeClr val="tx1"/>
+          </a:fontRef>
+        </p:style>
+      </p:cxnSp>
+      <p:sp>
+        <p:nvSpPr>
+          <p:cNvPr id="28" name="Rounded Rectangle 27"/>
+          <p:cNvSpPr/>
+          <p:nvPr/>
+        </p:nvSpPr>
+        <p:spPr>
+          <a:xfrm>
+            <a:off x="590308" y="5175331"/>
+            <a:ext cx="2432025" cy="754044"/>
+          </a:xfrm>
+          <a:prstGeom prst="roundRect">
+            <a:avLst>
+              <a:gd name="adj" fmla="val 50000"/>
+            </a:avLst>
+          </a:prstGeom>
+          <a:solidFill>
+            <a:srgbClr val="E3EEF9"/>
+          </a:solidFill>
+          <a:ln w="15875">
+            <a:solidFill>
+              <a:srgbClr val="2F5597"/>
+            </a:solidFill>
+          </a:ln>
+          <a:effectLst/>
+        </p:spPr>
+        <p:style>
+          <a:lnRef idx="1">
+            <a:schemeClr val="accent1"/>
+          </a:lnRef>
+          <a:fillRef idx="3">
+            <a:schemeClr val="accent1"/>
+          </a:fillRef>
+          <a:effectRef idx="2">
+            <a:schemeClr val="accent1"/>
+          </a:effectRef>
+          <a:fontRef idx="minor">
+            <a:schemeClr val="lt1"/>
+          </a:fontRef>
+        </p:style>
+        <p:txBody>
+          <a:bodyPr rtlCol="0" anchor="ctr" wrap="none" lIns="64000" rIns="64000" tIns="25400" bIns="25400"/>
+          <a:lstStyle/>
+          <a:p>
+            <a:pPr algn="ctr"/>
+            <a:r>
+              <a:rPr sz="1300" b="0">
+                <a:solidFill>
+                  <a:srgbClr val="000000"/>
+                </a:solidFill>
+                <a:latin typeface="Calibri"/>
+              </a:rPr>
+              <a:t>Quy tắc 2 (y''):</a:t>
+            </a:r>
+          </a:p>
+          <a:p>
+            <a:pPr algn="ctr"/>
+            <a:r>
+              <a:rPr sz="1300" b="0">
+                <a:solidFill>
+                  <a:srgbClr val="000000"/>
+                </a:solidFill>
+                <a:latin typeface="Calibri"/>
+              </a:rPr>
+              <a:t>y'(x₀)=0, y''(x₀)&gt;0 → Cực</a:t>
+            </a:r>
+          </a:p>
+          <a:p>
+            <a:pPr algn="ctr"/>
+            <a:r>
+              <a:rPr sz="1300" b="0">
+                <a:solidFill>
+                  <a:srgbClr val="000000"/>
+                </a:solidFill>
+                <a:latin typeface="Calibri"/>
+              </a:rPr>
+              <a:t>tiểu</a:t>
+            </a:r>
+          </a:p>
+        </p:txBody>
+      </p:sp>
+      <p:sp>
+        <p:nvSpPr>
+          <p:cNvPr id="29" name="Oval 28"/>
+          <p:cNvSpPr/>
+          <p:nvPr/>
+        </p:nvSpPr>
+        <p:spPr>
+          <a:xfrm>
+            <a:off x="3433264" y="4826713"/>
+            <a:ext cx="1811249" cy="823767"/>
+          </a:xfrm>
+          <a:prstGeom prst="ellipse">
+            <a:avLst/>
+          </a:prstGeom>
+          <a:solidFill>
+            <a:srgbClr val="E2EFDA"/>
+          </a:solidFill>
+          <a:ln w="31750">
+            <a:solidFill>
+              <a:srgbClr val="375623"/>
+            </a:solidFill>
+          </a:ln>
+          <a:effectLst/>
+        </p:spPr>
+        <p:style>
+          <a:lnRef idx="1">
+            <a:schemeClr val="accent1"/>
+          </a:lnRef>
+          <a:fillRef idx="3">
+            <a:schemeClr val="accent1"/>
+          </a:fillRef>
+          <a:effectRef idx="2">
+            <a:schemeClr val="accent1"/>
+          </a:effectRef>
+          <a:fontRef idx="minor">
+            <a:schemeClr val="lt1"/>
+          </a:fontRef>
+        </p:style>
+        <p:txBody>
+          <a:bodyPr rtlCol="0" anchor="ctr" wrap="none" lIns="64000" rIns="64000" tIns="25400" bIns="25400"/>
+          <a:lstStyle/>
+          <a:p>
+            <a:pPr algn="ctr"/>
+            <a:r>
+              <a:rPr sz="1500" b="1">
+                <a:solidFill>
+                  <a:srgbClr val="000000"/>
+                </a:solidFill>
+                <a:latin typeface="Calibri"/>
+              </a:rPr>
+              <a:t>Quy tắc tìm</a:t>
+            </a:r>
+          </a:p>
+          <a:p>
+            <a:pPr algn="ctr"/>
+            <a:r>
+              <a:rPr sz="1500" b="1">
+                <a:solidFill>
+                  <a:srgbClr val="000000"/>
+                </a:solidFill>
+                <a:latin typeface="Calibri"/>
+              </a:rPr>
+              <a:t>cực trị</a:t>
+            </a:r>
+          </a:p>
+        </p:txBody>
+      </p:sp>
+      <p:cxnSp>
+        <p:nvCxnSpPr>
+          <p:cNvPr id="30" name="Connector 29"/>
+          <p:cNvCxnSpPr/>
+          <p:nvPr/>
+        </p:nvCxnSpPr>
+        <p:spPr>
+          <a:xfrm>
+            <a:off x="6027267" y="3954780"/>
+            <a:ext cx="1688379" cy="1283817"/>
+          </a:xfrm>
+          <a:prstGeom prst="line">
+            <a:avLst/>
+          </a:prstGeom>
+          <a:ln w="44450">
+            <a:solidFill>
+              <a:srgbClr val="7030A0"/>
+            </a:solidFill>
+          </a:ln>
+        </p:spPr>
+        <p:style>
+          <a:lnRef idx="2">
+            <a:schemeClr val="accent1"/>
+          </a:lnRef>
+          <a:fillRef idx="0">
+            <a:schemeClr val="accent1"/>
+          </a:fillRef>
+          <a:effectRef idx="1">
+            <a:schemeClr val="accent1"/>
+          </a:effectRef>
+          <a:fontRef idx="minor">
+            <a:schemeClr val="tx1"/>
+          </a:fontRef>
+        </p:style>
+      </p:cxnSp>
+      <p:cxnSp>
+        <p:nvCxnSpPr>
+          <p:cNvPr id="31" name="Connector 30"/>
+          <p:cNvCxnSpPr/>
+          <p:nvPr/>
+        </p:nvCxnSpPr>
+        <p:spPr>
+          <a:xfrm flipV="1">
+            <a:off x="7715646" y="4824130"/>
+            <a:ext cx="1702889" cy="414467"/>
+          </a:xfrm>
+          <a:prstGeom prst="line">
+            <a:avLst/>
+          </a:prstGeom>
+          <a:ln w="15875">
+            <a:solidFill>
+              <a:srgbClr val="7030A0"/>
+            </a:solidFill>
+          </a:ln>
+        </p:spPr>
+        <p:style>
+          <a:lnRef idx="2">
+            <a:schemeClr val="accent1"/>
+          </a:lnRef>
+          <a:fillRef idx="0">
+            <a:schemeClr val="accent1"/>
+          </a:fillRef>
+          <a:effectRef idx="1">
+            <a:schemeClr val="accent1"/>
+          </a:effectRef>
+          <a:fontRef idx="minor">
+            <a:schemeClr val="tx1"/>
+          </a:fontRef>
+        </p:style>
+      </p:cxnSp>
+      <p:sp>
+        <p:nvSpPr>
+          <p:cNvPr id="32" name="Rounded Rectangle 31"/>
+          <p:cNvSpPr/>
+          <p:nvPr/>
+        </p:nvSpPr>
+        <p:spPr>
+          <a:xfrm>
+            <a:off x="9418535" y="4547819"/>
+            <a:ext cx="1659357" cy="552622"/>
+          </a:xfrm>
+          <a:prstGeom prst="roundRect">
+            <a:avLst>
+              <a:gd name="adj" fmla="val 50000"/>
+            </a:avLst>
+          </a:prstGeom>
+          <a:solidFill>
+            <a:srgbClr val="F3E8F7"/>
+          </a:solidFill>
+          <a:ln w="15875">
+            <a:solidFill>
+              <a:srgbClr val="7030A0"/>
+            </a:solidFill>
+          </a:ln>
+          <a:effectLst/>
+        </p:spPr>
+        <p:style>
+          <a:lnRef idx="1">
+            <a:schemeClr val="accent1"/>
+          </a:lnRef>
+          <a:fillRef idx="3">
+            <a:schemeClr val="accent1"/>
+          </a:fillRef>
+          <a:effectRef idx="2">
+            <a:schemeClr val="accent1"/>
+          </a:effectRef>
+          <a:fontRef idx="minor">
+            <a:schemeClr val="lt1"/>
+          </a:fontRef>
+        </p:style>
+        <p:txBody>
+          <a:bodyPr rtlCol="0" anchor="ctr" wrap="none" lIns="64000" rIns="64000" tIns="25400" bIns="25400"/>
+          <a:lstStyle/>
+          <a:p>
+            <a:pPr algn="ctr"/>
+            <a:r>
+              <a:rPr sz="1300" b="0">
+                <a:solidFill>
+                  <a:srgbClr val="000000"/>
+                </a:solidFill>
+                <a:latin typeface="Calibri"/>
+              </a:rPr>
+              <a:t>Bài toán tối ưu:</a:t>
+            </a:r>
+          </a:p>
+          <a:p>
+            <a:pPr algn="ctr"/>
+            <a:r>
+              <a:rPr sz="1300" b="0">
+                <a:solidFill>
+                  <a:srgbClr val="000000"/>
+                </a:solidFill>
+                <a:latin typeface="Calibri"/>
+              </a:rPr>
+              <a:t>hộp, bể chứa</a:t>
+            </a:r>
+          </a:p>
+        </p:txBody>
+      </p:sp>
+      <p:cxnSp>
+        <p:nvCxnSpPr>
+          <p:cNvPr id="33" name="Connector 32"/>
+          <p:cNvCxnSpPr/>
+          <p:nvPr/>
+        </p:nvCxnSpPr>
+        <p:spPr>
+          <a:xfrm>
+            <a:off x="7715646" y="5238597"/>
+            <a:ext cx="1617037" cy="313756"/>
+          </a:xfrm>
+          <a:prstGeom prst="line">
+            <a:avLst/>
+          </a:prstGeom>
+          <a:ln w="15875">
+            <a:solidFill>
+              <a:srgbClr val="7030A0"/>
+            </a:solidFill>
+          </a:ln>
+        </p:spPr>
+        <p:style>
+          <a:lnRef idx="2">
+            <a:schemeClr val="accent1"/>
+          </a:lnRef>
+          <a:fillRef idx="0">
+            <a:schemeClr val="accent1"/>
+          </a:fillRef>
+          <a:effectRef idx="1">
+            <a:schemeClr val="accent1"/>
+          </a:effectRef>
+          <a:fontRef idx="minor">
+            <a:schemeClr val="tx1"/>
+          </a:fontRef>
+        </p:style>
+      </p:cxnSp>
+      <p:sp>
+        <p:nvSpPr>
+          <p:cNvPr id="34" name="Rounded Rectangle 33"/>
+          <p:cNvSpPr/>
+          <p:nvPr/>
+        </p:nvSpPr>
+        <p:spPr>
+          <a:xfrm>
+            <a:off x="9332683" y="5175331"/>
+            <a:ext cx="1831061" cy="754044"/>
+          </a:xfrm>
+          <a:prstGeom prst="roundRect">
+            <a:avLst>
+              <a:gd name="adj" fmla="val 50000"/>
+            </a:avLst>
+          </a:prstGeom>
+          <a:solidFill>
+            <a:srgbClr val="F3E8F7"/>
+          </a:solidFill>
+          <a:ln w="15875">
+            <a:solidFill>
+              <a:srgbClr val="7030A0"/>
+            </a:solidFill>
+          </a:ln>
+          <a:effectLst/>
+        </p:spPr>
+        <p:style>
+          <a:lnRef idx="1">
+            <a:schemeClr val="accent1"/>
+          </a:lnRef>
+          <a:fillRef idx="3">
+            <a:schemeClr val="accent1"/>
+          </a:fillRef>
+          <a:effectRef idx="2">
+            <a:schemeClr val="accent1"/>
+          </a:effectRef>
+          <a:fontRef idx="minor">
+            <a:schemeClr val="lt1"/>
+          </a:fontRef>
+        </p:style>
+        <p:txBody>
+          <a:bodyPr rtlCol="0" anchor="ctr" wrap="none" lIns="64000" rIns="64000" tIns="25400" bIns="25400"/>
+          <a:lstStyle/>
+          <a:p>
+            <a:pPr algn="ctr"/>
+            <a:r>
+              <a:rPr sz="1300" b="0">
+                <a:solidFill>
+                  <a:srgbClr val="000000"/>
+                </a:solidFill>
+                <a:latin typeface="Calibri"/>
+              </a:rPr>
+              <a:t>Tìm m để hàm</a:t>
+            </a:r>
+          </a:p>
+          <a:p>
+            <a:pPr algn="ctr"/>
+            <a:r>
+              <a:rPr sz="1300" b="0">
+                <a:solidFill>
+                  <a:srgbClr val="000000"/>
+                </a:solidFill>
+                <a:latin typeface="Calibri"/>
+              </a:rPr>
+              <a:t>số có/không có cực</a:t>
+            </a:r>
+          </a:p>
+          <a:p>
+            <a:pPr algn="ctr"/>
+            <a:r>
+              <a:rPr sz="1300" b="0">
+                <a:solidFill>
+                  <a:srgbClr val="000000"/>
+                </a:solidFill>
+                <a:latin typeface="Calibri"/>
+              </a:rPr>
+              <a:t>trị</a:t>
+            </a:r>
+          </a:p>
+        </p:txBody>
+      </p:sp>
+      <p:sp>
+        <p:nvSpPr>
+          <p:cNvPr id="35" name="Oval 34"/>
+          <p:cNvSpPr/>
+          <p:nvPr/>
+        </p:nvSpPr>
+        <p:spPr>
+          <a:xfrm>
+            <a:off x="6671337" y="4826713"/>
+            <a:ext cx="2088617" cy="823767"/>
+          </a:xfrm>
+          <a:prstGeom prst="ellipse">
+            <a:avLst/>
+          </a:prstGeom>
+          <a:solidFill>
+            <a:srgbClr val="FFF2CC"/>
+          </a:solidFill>
+          <a:ln w="31750">
+            <a:solidFill>
+              <a:srgbClr val="BF8F00"/>
+            </a:solidFill>
+          </a:ln>
+          <a:effectLst/>
+        </p:spPr>
+        <p:style>
+          <a:lnRef idx="1">
+            <a:schemeClr val="accent1"/>
+          </a:lnRef>
+          <a:fillRef idx="3">
+            <a:schemeClr val="accent1"/>
+          </a:fillRef>
+          <a:effectRef idx="2">
+            <a:schemeClr val="accent1"/>
+          </a:effectRef>
+          <a:fontRef idx="minor">
+            <a:schemeClr val="lt1"/>
+          </a:fontRef>
+        </p:style>
+        <p:txBody>
+          <a:bodyPr rtlCol="0" anchor="ctr" wrap="none" lIns="64000" rIns="64000" tIns="25400" bIns="25400"/>
+          <a:lstStyle/>
+          <a:p>
+            <a:pPr algn="ctr"/>
+            <a:r>
+              <a:rPr sz="1500" b="1">
+                <a:solidFill>
+                  <a:srgbClr val="000000"/>
+                </a:solidFill>
+                <a:latin typeface="Calibri"/>
+              </a:rPr>
+              <a:t>Ứng dụng thực</a:t>
+            </a:r>
+          </a:p>
+          <a:p>
+            <a:pPr algn="ctr"/>
+            <a:r>
+              <a:rPr sz="1500" b="1">
+                <a:solidFill>
+                  <a:srgbClr val="000000"/>
+                </a:solidFill>
+                <a:latin typeface="Calibri"/>
+              </a:rPr>
+              <a:t>tiễn</a:t>
+            </a:r>
+          </a:p>
+        </p:txBody>
+      </p:sp>
+      <p:sp>
+        <p:nvSpPr>
+          <p:cNvPr id="36" name="Oval 35"/>
+          <p:cNvSpPr/>
+          <p:nvPr/>
+        </p:nvSpPr>
+        <p:spPr>
+          <a:xfrm>
+            <a:off x="4862765" y="3484793"/>
+            <a:ext cx="2329003" cy="939972"/>
+          </a:xfrm>
+          <a:prstGeom prst="ellipse">
+            <a:avLst/>
+          </a:prstGeom>
+          <a:solidFill>
+            <a:srgbClr val="002060"/>
+          </a:solidFill>
+          <a:ln w="25400">
+            <a:solidFill>
+              <a:srgbClr val="000B1E"/>
+            </a:solidFill>
+          </a:ln>
+          <a:effectLst/>
+        </p:spPr>
+        <p:style>
+          <a:lnRef idx="1">
+            <a:schemeClr val="accent1"/>
+          </a:lnRef>
+          <a:fillRef idx="3">
+            <a:schemeClr val="accent1"/>
+          </a:fillRef>
+          <a:effectRef idx="2">
+            <a:schemeClr val="accent1"/>
+          </a:effectRef>
+          <a:fontRef idx="minor">
+            <a:schemeClr val="lt1"/>
+          </a:fontRef>
+        </p:style>
+        <p:txBody>
+          <a:bodyPr rtlCol="0" anchor="ctr" wrap="none" lIns="64000" rIns="64000" tIns="25400" bIns="25400"/>
+          <a:lstStyle/>
+          <a:p>
+            <a:pPr algn="ctr"/>
+            <a:r>
+              <a:rPr sz="1700" b="1">
+                <a:solidFill>
+                  <a:srgbClr val="FFFFFF"/>
+                </a:solidFill>
+                <a:latin typeface="Calibri"/>
+              </a:rPr>
+              <a:t>TÍNH ĐƠN ĐIỆU</a:t>
+            </a:r>
+          </a:p>
+          <a:p>
+            <a:pPr algn="ctr"/>
+            <a:r>
+              <a:rPr sz="1700" b="1">
+                <a:solidFill>
+                  <a:srgbClr val="FFFFFF"/>
+                </a:solidFill>
+                <a:latin typeface="Calibri"/>
+              </a:rPr>
+              <a:t>&amp; CỰC TRỊ</a:t>
+            </a:r>
+          </a:p>
+        </p:txBody>
+      </p:sp>
     </p:spTree>
   </p:cSld>
   <p:clrMapOvr>
